--- a/output/test_deck_regen_concept/Python_Advanced_Concepts_Python.pptx
+++ b/output/test_deck_regen_concept/Python_Advanced_Concepts_Python.pptx
@@ -632,8 +632,8 @@
         </p:nvSpPr>
         <p:spPr>
           <a:xfrm>
-            <a:off x="685800" y="2130425"/>
-            <a:ext cx="7772400" cy="1470025"/>
+            <a:off x="1371600" y="1828800"/>
+            <a:ext cx="9445752" cy="1645920"/>
           </a:xfrm>
         </p:spPr>
         <p:txBody>
@@ -660,8 +660,8 @@
         </p:nvSpPr>
         <p:spPr>
           <a:xfrm>
-            <a:off x="1371600" y="3886200"/>
-            <a:ext cx="6400800" cy="1752600"/>
+            <a:off x="1371600" y="3840480"/>
+            <a:ext cx="9445752" cy="1097280"/>
           </a:xfrm>
         </p:spPr>
         <p:txBody>
@@ -800,7 +800,12 @@
             <p:ph type="ftr" sz="quarter" idx="11"/>
           </p:nvPr>
         </p:nvSpPr>
-        <p:spPr/>
+        <p:spPr>
+          <a:xfrm>
+            <a:off x="1371600" y="6217920"/>
+            <a:ext cx="8229600" cy="320040"/>
+          </a:xfrm>
+        </p:spPr>
         <p:txBody>
           <a:bodyPr/>
           <a:lstStyle/>
@@ -1222,7 +1227,12 @@
             <p:ph type="title"/>
           </p:nvPr>
         </p:nvSpPr>
-        <p:spPr/>
+        <p:spPr>
+          <a:xfrm>
+            <a:off x="1371600" y="950976"/>
+            <a:ext cx="9445752" cy="640080"/>
+          </a:xfrm>
+        </p:spPr>
         <p:txBody>
           <a:bodyPr/>
           <a:lstStyle/>
@@ -1245,7 +1255,12 @@
             <p:ph idx="1"/>
           </p:nvPr>
         </p:nvSpPr>
-        <p:spPr/>
+        <p:spPr>
+          <a:xfrm>
+            <a:off x="1371600" y="1709928"/>
+            <a:ext cx="9445752" cy="4297680"/>
+          </a:xfrm>
+        </p:spPr>
         <p:txBody>
           <a:bodyPr/>
           <a:lstStyle/>
@@ -1320,7 +1335,12 @@
             <p:ph type="ftr" sz="quarter" idx="11"/>
           </p:nvPr>
         </p:nvSpPr>
-        <p:spPr/>
+        <p:spPr>
+          <a:xfrm>
+            <a:off x="1371600" y="6217920"/>
+            <a:ext cx="8229600" cy="320040"/>
+          </a:xfrm>
+        </p:spPr>
         <p:txBody>
           <a:bodyPr/>
           <a:lstStyle/>
@@ -1339,7 +1359,12 @@
             <p:ph type="sldNum" sz="quarter" idx="12"/>
           </p:nvPr>
         </p:nvSpPr>
-        <p:spPr/>
+        <p:spPr>
+          <a:xfrm>
+            <a:off x="10058400" y="6217920"/>
+            <a:ext cx="914400" cy="320040"/>
+          </a:xfrm>
+        </p:spPr>
         <p:txBody>
           <a:bodyPr/>
           <a:lstStyle/>
@@ -1638,7 +1663,12 @@
             <p:ph type="title"/>
           </p:nvPr>
         </p:nvSpPr>
-        <p:spPr/>
+        <p:spPr>
+          <a:xfrm>
+            <a:off x="1371600" y="950976"/>
+            <a:ext cx="9445752" cy="640080"/>
+          </a:xfrm>
+        </p:spPr>
         <p:txBody>
           <a:bodyPr/>
           <a:lstStyle/>
@@ -1663,8 +1693,8 @@
         </p:nvSpPr>
         <p:spPr>
           <a:xfrm>
-            <a:off x="457200" y="1600200"/>
-            <a:ext cx="4038600" cy="4525963"/>
+            <a:off x="1371600" y="1709928"/>
+            <a:ext cx="4572000" cy="4297680"/>
           </a:xfrm>
         </p:spPr>
         <p:txBody>
@@ -1748,8 +1778,8 @@
         </p:nvSpPr>
         <p:spPr>
           <a:xfrm>
-            <a:off x="4648200" y="1600200"/>
-            <a:ext cx="4038600" cy="4525963"/>
+            <a:off x="6217920" y="1709928"/>
+            <a:ext cx="4572000" cy="4297680"/>
           </a:xfrm>
         </p:spPr>
         <p:txBody>
@@ -1854,7 +1884,12 @@
             <p:ph type="ftr" sz="quarter" idx="11"/>
           </p:nvPr>
         </p:nvSpPr>
-        <p:spPr/>
+        <p:spPr>
+          <a:xfrm>
+            <a:off x="1371600" y="6217920"/>
+            <a:ext cx="8229600" cy="320040"/>
+          </a:xfrm>
+        </p:spPr>
         <p:txBody>
           <a:bodyPr/>
           <a:lstStyle/>
@@ -1873,7 +1908,12 @@
             <p:ph type="sldNum" sz="quarter" idx="12"/>
           </p:nvPr>
         </p:nvSpPr>
-        <p:spPr/>
+        <p:spPr>
+          <a:xfrm>
+            <a:off x="10058400" y="6217920"/>
+            <a:ext cx="914400" cy="320040"/>
+          </a:xfrm>
+        </p:spPr>
         <p:txBody>
           <a:bodyPr/>
           <a:lstStyle/>
@@ -3586,7 +3626,7 @@
       <p:grpSpPr/>
       <p:pic>
         <p:nvPicPr>
-          <p:cNvPr id="2" name="Picture 1" descr="DPU_background.png"/>
+          <p:cNvPr id="4" name="Picture 3" descr="DPU_Brand_template.png"/>
           <p:cNvPicPr>
             <a:picLocks noChangeAspect="1"/>
           </p:cNvPicPr>
@@ -3610,14 +3650,119 @@
       </p:pic>
       <p:sp>
         <p:nvSpPr>
-          <p:cNvPr id="3" name="TextBox 2"/>
+          <p:cNvPr id="2" name="Title 1"/>
+          <p:cNvSpPr>
+            <a:spLocks noGrp="1"/>
+          </p:cNvSpPr>
+          <p:nvPr>
+            <p:ph type="ctrTitle"/>
+          </p:nvPr>
+        </p:nvSpPr>
+        <p:spPr>
+          <a:xfrm>
+            <a:off x="1371599" y="1079500"/>
+            <a:ext cx="9448799" cy="438149"/>
+          </a:xfrm>
+        </p:spPr>
+        <p:txBody>
+          <a:bodyPr wrap="square"/>
+          <a:lstStyle/>
+          <a:p>
+            <a:pPr algn="l">
+              <a:defRPr sz="4400" b="1">
+                <a:solidFill>
+                  <a:srgbClr val="C0392B"/>
+                </a:solidFill>
+                <a:latin typeface="Arial"/>
+              </a:defRPr>
+            </a:pPr>
+            <a:r>
+              <a:t>Welcome Slide</a:t>
+            </a:r>
+          </a:p>
+        </p:txBody>
+      </p:sp>
+      <p:sp>
+        <p:nvSpPr>
+          <p:cNvPr id="3" name="Subtitle 2"/>
+          <p:cNvSpPr>
+            <a:spLocks noGrp="1"/>
+          </p:cNvSpPr>
+          <p:nvPr>
+            <p:ph type="subTitle" idx="1"/>
+          </p:nvPr>
+        </p:nvSpPr>
+        <p:spPr>
+          <a:xfrm>
+            <a:off x="1371599" y="5397500"/>
+            <a:ext cx="9448799" cy="330200"/>
+          </a:xfrm>
+        </p:spPr>
+        <p:txBody>
+          <a:bodyPr wrap="square"/>
+          <a:lstStyle/>
+          <a:p>
+            <a:pPr algn="l">
+              <a:defRPr sz="3000" b="1">
+                <a:solidFill>
+                  <a:srgbClr val="002147"/>
+                </a:solidFill>
+                <a:latin typeface="Segoe UI"/>
+              </a:defRPr>
+            </a:pPr>
+            <a:r>
+              <a:t>Presented By Prof. Tester</a:t>
+            </a:r>
+          </a:p>
+          <a:p>
+            <a:pPr algn="l">
+              <a:defRPr sz="1600">
+                <a:solidFill>
+                  <a:srgbClr val="64748B"/>
+                </a:solidFill>
+                <a:latin typeface="Segoe UI"/>
+              </a:defRPr>
+            </a:pPr>
+            <a:r>
+              <a:t>DPU Course Material</a:t>
+            </a:r>
+          </a:p>
+        </p:txBody>
+      </p:sp>
+      <p:pic>
+        <p:nvPicPr>
+          <p:cNvPr id="5" name="Picture 4" descr="dpu_logo.png"/>
+          <p:cNvPicPr>
+            <a:picLocks noChangeAspect="1"/>
+          </p:cNvPicPr>
+          <p:nvPr/>
+        </p:nvPicPr>
+        <p:blipFill>
+          <a:blip r:embed="rId3"/>
+          <a:stretch>
+            <a:fillRect/>
+          </a:stretch>
+        </p:blipFill>
+        <p:spPr>
+          <a:xfrm>
+            <a:off x="365760" y="182880"/>
+            <a:ext cx="2926080" cy="731520"/>
+          </a:xfrm>
+          <a:prstGeom prst="rect">
+            <a:avLst/>
+          </a:prstGeom>
+        </p:spPr>
+      </p:pic>
+      <p:sp>
+        <p:nvSpPr>
+          <p:cNvPr id="6" name="Footer Placeholder"/>
           <p:cNvSpPr txBox="1"/>
           <p:nvPr/>
         </p:nvSpPr>
         <p:spPr>
           <a:xfrm>
-            <a:off x="1981199" y="1079500"/>
-            <a:ext cx="8229599" cy="438149"/>
+            <a:off x="1371599" y="6223000"/>
+            <a:ext cx="8889999" cy="285750"/>
           </a:xfrm>
           <a:prstGeom prst="rect">
             <a:avLst/>
@@ -3625,134 +3770,21 @@
           <a:noFill/>
         </p:spPr>
         <p:txBody>
-          <a:bodyPr wrap="square" anchor="ctr">
+          <a:bodyPr wrap="square">
             <a:spAutoFit/>
           </a:bodyPr>
           <a:lstStyle/>
           <a:p>
             <a:pPr algn="l">
-              <a:defRPr sz="4400" b="1">
-                <a:solidFill>
-                  <a:srgbClr val="00132A"/>
-                </a:solidFill>
-                <a:latin typeface="Arial"/>
-              </a:defRPr>
-            </a:pPr>
-            <a:r>
-              <a:t>Welcome Slide</a:t>
-            </a:r>
-          </a:p>
-        </p:txBody>
-      </p:sp>
-      <p:sp>
-        <p:nvSpPr>
-          <p:cNvPr id="4" name="Rounded Rectangle 3"/>
-          <p:cNvSpPr/>
-          <p:nvPr/>
-        </p:nvSpPr>
-        <p:spPr>
-          <a:xfrm>
-            <a:off x="2235199" y="5556250"/>
-            <a:ext cx="7721599" cy="330200"/>
-          </a:xfrm>
-          <a:prstGeom prst="roundRect">
-            <a:avLst/>
-          </a:prstGeom>
-          <a:solidFill>
-            <a:srgbClr val="FFFFFF"/>
-          </a:solidFill>
-          <a:ln w="19050">
-            <a:solidFill>
-              <a:srgbClr val="002147"/>
-            </a:solidFill>
-          </a:ln>
-        </p:spPr>
-        <p:style>
-          <a:lnRef idx="1">
-            <a:schemeClr val="accent1"/>
-          </a:lnRef>
-          <a:fillRef idx="3">
-            <a:schemeClr val="accent1"/>
-          </a:fillRef>
-          <a:effectRef idx="2">
-            <a:schemeClr val="accent1"/>
-          </a:effectRef>
-          <a:fontRef idx="minor">
-            <a:schemeClr val="lt1"/>
-          </a:fontRef>
-        </p:style>
-        <p:txBody>
-          <a:bodyPr rtlCol="0" anchor="ctr" wrap="square"/>
-          <a:lstStyle/>
-          <a:p>
-            <a:pPr algn="ctr">
-              <a:defRPr sz="3000" b="1">
-                <a:solidFill>
-                  <a:srgbClr val="00132A"/>
+              <a:defRPr sz="1100">
+                <a:solidFill>
+                  <a:srgbClr val="64748B"/>
                 </a:solidFill>
                 <a:latin typeface="Segoe UI"/>
               </a:defRPr>
             </a:pPr>
             <a:r>
-              <a:t>Presented By Prof. Tester</a:t>
-            </a:r>
-          </a:p>
-        </p:txBody>
-      </p:sp>
-      <p:sp>
-        <p:nvSpPr>
-          <p:cNvPr id="5" name="Rounded Rectangle 4"/>
-          <p:cNvSpPr/>
-          <p:nvPr/>
-        </p:nvSpPr>
-        <p:spPr>
-          <a:xfrm>
-            <a:off x="2235199" y="1822449"/>
-            <a:ext cx="7721599" cy="317500"/>
-          </a:xfrm>
-          <a:prstGeom prst="roundRect">
-            <a:avLst/>
-          </a:prstGeom>
-          <a:solidFill>
-            <a:srgbClr val="F8FAFC"/>
-          </a:solidFill>
-          <a:ln w="12700">
-            <a:solidFill>
-              <a:srgbClr val="E2E8F0"/>
-            </a:solidFill>
-          </a:ln>
-        </p:spPr>
-        <p:style>
-          <a:lnRef idx="1">
-            <a:schemeClr val="accent1"/>
-          </a:lnRef>
-          <a:fillRef idx="3">
-            <a:schemeClr val="accent1"/>
-          </a:fillRef>
-          <a:effectRef idx="2">
-            <a:schemeClr val="accent1"/>
-          </a:effectRef>
-          <a:fontRef idx="minor">
-            <a:schemeClr val="lt1"/>
-          </a:fontRef>
-        </p:style>
-        <p:txBody>
-          <a:bodyPr rtlCol="0" anchor="t" wrap="square"/>
-          <a:lstStyle/>
-          <a:p>
-            <a:pPr algn="l">
-              <a:spcAft>
-                <a:spcPts val="1200"/>
-              </a:spcAft>
-              <a:defRPr sz="3000">
-                <a:solidFill>
-                  <a:srgbClr val="0F172A"/>
-                </a:solidFill>
-                <a:latin typeface="Segoe UI"/>
-              </a:defRPr>
-            </a:pPr>
-            <a:r>
-              <a:t>•  Overview</a:t>
+              <a:t>Dr. D. Y. Patil Vidyapeeth, Pune (Deemed to be University)</a:t>
             </a:r>
           </a:p>
         </p:txBody>
@@ -3777,7 +3809,7 @@
       <p:grpSpPr/>
       <p:pic>
         <p:nvPicPr>
-          <p:cNvPr id="2" name="Picture 1" descr="DPU_background.png"/>
+          <p:cNvPr id="5" name="Picture 4" descr="DPU_Brand_template.png"/>
           <p:cNvPicPr>
             <a:picLocks noChangeAspect="1"/>
           </p:cNvPicPr>
@@ -3801,96 +3833,157 @@
       </p:pic>
       <p:sp>
         <p:nvSpPr>
-          <p:cNvPr id="3" name="TextBox 2"/>
-          <p:cNvSpPr txBox="1"/>
+          <p:cNvPr id="2" name="Title 1"/>
+          <p:cNvSpPr>
+            <a:spLocks noGrp="1"/>
+          </p:cNvSpPr>
+          <p:nvPr>
+            <p:ph type="title"/>
+          </p:nvPr>
+        </p:nvSpPr>
+        <p:spPr>
+          <a:xfrm>
+            <a:off x="1371599" y="1079500"/>
+            <a:ext cx="9448799" cy="438149"/>
+          </a:xfrm>
+        </p:spPr>
+        <p:txBody>
+          <a:bodyPr wrap="square"/>
+          <a:lstStyle/>
+          <a:p>
+            <a:pPr algn="l">
+              <a:defRPr sz="4400" b="1">
+                <a:solidFill>
+                  <a:srgbClr val="C0392B"/>
+                </a:solidFill>
+                <a:latin typeface="Arial"/>
+              </a:defRPr>
+            </a:pPr>
+            <a:r>
+              <a:t>Original Concept</a:t>
+            </a:r>
+          </a:p>
+        </p:txBody>
+      </p:sp>
+      <p:sp>
+        <p:nvSpPr>
+          <p:cNvPr id="3" name="Content Placeholder 2"/>
+          <p:cNvSpPr>
+            <a:spLocks noGrp="1"/>
+          </p:cNvSpPr>
+          <p:nvPr>
+            <p:ph idx="1" sz="half"/>
+          </p:nvPr>
+        </p:nvSpPr>
+        <p:spPr>
+          <a:xfrm>
+            <a:off x="1371599" y="1695449"/>
+            <a:ext cx="4044949" cy="2159000"/>
+          </a:xfrm>
+        </p:spPr>
+        <p:txBody>
+          <a:bodyPr wrap="square" anchor="t"/>
+          <a:lstStyle/>
+          <a:p>
+            <a:pPr algn="l">
+              <a:spcAft>
+                <a:spcPts val="1000"/>
+              </a:spcAft>
+              <a:defRPr sz="3000">
+                <a:solidFill>
+                  <a:srgbClr val="0F172A"/>
+                </a:solidFill>
+                <a:latin typeface="Segoe UI"/>
+              </a:defRPr>
+            </a:pPr>
+            <a:r>
+              <a:t>•  Refined: Focus on Python generators and</a:t>
+            </a:r>
+          </a:p>
+          <a:p>
+            <a:pPr algn="l">
+              <a:spcAft>
+                <a:spcPts val="1000"/>
+              </a:spcAft>
+              <a:defRPr sz="3000">
+                <a:solidFill>
+                  <a:srgbClr val="0F172A"/>
+                </a:solidFill>
+                <a:latin typeface="Segoe UI"/>
+              </a:defRPr>
+            </a:pPr>
+            <a:r>
+              <a:t>•  Original Bullet</a:t>
+            </a:r>
+          </a:p>
+        </p:txBody>
+      </p:sp>
+      <p:sp>
+        <p:nvSpPr>
+          <p:cNvPr id="4" name="Content Placeholder 3"/>
+          <p:cNvSpPr>
+            <a:spLocks noGrp="1"/>
+          </p:cNvSpPr>
+          <p:nvPr>
+            <p:ph idx="2" sz="half"/>
+          </p:nvPr>
+        </p:nvSpPr>
+        <p:spPr>
+          <a:xfrm>
+            <a:off x="5670549" y="1695449"/>
+            <a:ext cx="5149849" cy="2159000"/>
+          </a:xfrm>
+        </p:spPr>
+        <p:txBody>
+          <a:bodyPr/>
+          <a:lstStyle/>
+          <a:p/>
+        </p:txBody>
+      </p:sp>
+      <p:pic>
+        <p:nvPicPr>
+          <p:cNvPr id="6" name="Picture 5" descr="dpu_logo.png"/>
+          <p:cNvPicPr>
+            <a:picLocks noChangeAspect="1"/>
+          </p:cNvPicPr>
           <p:nvPr/>
-        </p:nvSpPr>
-        <p:spPr>
-          <a:xfrm>
-            <a:off x="1981199" y="1079500"/>
-            <a:ext cx="8229599" cy="438149"/>
+        </p:nvPicPr>
+        <p:blipFill>
+          <a:blip r:embed="rId3"/>
+          <a:stretch>
+            <a:fillRect/>
+          </a:stretch>
+        </p:blipFill>
+        <p:spPr>
+          <a:xfrm>
+            <a:off x="365760" y="182880"/>
+            <a:ext cx="2926080" cy="731520"/>
           </a:xfrm>
           <a:prstGeom prst="rect">
             <a:avLst/>
           </a:prstGeom>
-          <a:noFill/>
-        </p:spPr>
-        <p:txBody>
-          <a:bodyPr wrap="square" anchor="ctr">
-            <a:spAutoFit/>
-          </a:bodyPr>
-          <a:lstStyle/>
-          <a:p>
-            <a:pPr algn="l">
-              <a:defRPr sz="4400" b="1">
-                <a:solidFill>
-                  <a:srgbClr val="00132A"/>
-                </a:solidFill>
-                <a:latin typeface="Arial"/>
-              </a:defRPr>
-            </a:pPr>
-            <a:r>
-              <a:t>Original Concept</a:t>
-            </a:r>
-          </a:p>
-        </p:txBody>
-      </p:sp>
-      <p:sp>
-        <p:nvSpPr>
-          <p:cNvPr id="4" name="TextBox 3"/>
-          <p:cNvSpPr txBox="1"/>
-          <p:nvPr/>
-        </p:nvSpPr>
-        <p:spPr>
-          <a:xfrm>
-            <a:off x="1981199" y="6095999"/>
-            <a:ext cx="8229599" cy="152400"/>
-          </a:xfrm>
-          <a:prstGeom prst="rect">
-            <a:avLst/>
-          </a:prstGeom>
-          <a:noFill/>
-        </p:spPr>
-        <p:txBody>
-          <a:bodyPr wrap="square">
-            <a:spAutoFit/>
-          </a:bodyPr>
-          <a:lstStyle/>
-          <a:p>
-            <a:pPr algn="l">
-              <a:defRPr sz="1200">
-                <a:solidFill>
-                  <a:srgbClr val="64748B"/>
-                </a:solidFill>
-                <a:latin typeface="Segoe UI"/>
-              </a:defRPr>
-            </a:pPr>
-            <a:r>
-              <a:t>DPU   •   Original Concept   •   Slide 2</a:t>
-            </a:r>
-          </a:p>
-        </p:txBody>
-      </p:sp>
-      <p:sp>
-        <p:nvSpPr>
-          <p:cNvPr id="5" name="Rounded Rectangle 4"/>
+        </p:spPr>
+      </p:pic>
+      <p:sp>
+        <p:nvSpPr>
+          <p:cNvPr id="7" name="Rounded Rectangle 6"/>
           <p:cNvSpPr/>
           <p:nvPr/>
         </p:nvSpPr>
         <p:spPr>
           <a:xfrm>
-            <a:off x="1981199" y="1695449"/>
-            <a:ext cx="3505199" cy="2159000"/>
+            <a:off x="5670549" y="1695449"/>
+            <a:ext cx="5149849" cy="2159000"/>
           </a:xfrm>
           <a:prstGeom prst="roundRect">
             <a:avLst/>
           </a:prstGeom>
           <a:solidFill>
-            <a:srgbClr val="F8FAFC"/>
+            <a:srgbClr val="1E1E2E"/>
           </a:solidFill>
-          <a:ln w="12700">
+          <a:ln w="19050">
             <a:solidFill>
-              <a:srgbClr val="E2E8F0"/>
+              <a:srgbClr val="002147"/>
             </a:solidFill>
           </a:ln>
         </p:spPr>
@@ -3909,88 +4002,14 @@
           </a:fontRef>
         </p:style>
         <p:txBody>
-          <a:bodyPr rtlCol="0" anchor="t" wrap="square"/>
-          <a:lstStyle/>
-          <a:p>
-            <a:pPr algn="l">
-              <a:spcAft>
-                <a:spcPts val="1200"/>
-              </a:spcAft>
-              <a:defRPr sz="3000">
-                <a:solidFill>
-                  <a:srgbClr val="0F172A"/>
-                </a:solidFill>
-                <a:latin typeface="Segoe UI"/>
-              </a:defRPr>
-            </a:pPr>
-            <a:r>
-              <a:t>•  Refined: Focus on Python generators and</a:t>
-            </a:r>
-          </a:p>
-          <a:p>
-            <a:pPr algn="l">
-              <a:spcAft>
-                <a:spcPts val="1200"/>
-              </a:spcAft>
-              <a:defRPr sz="3000">
-                <a:solidFill>
-                  <a:srgbClr val="0F172A"/>
-                </a:solidFill>
-                <a:latin typeface="Segoe UI"/>
-              </a:defRPr>
-            </a:pPr>
-            <a:r>
-              <a:t>•  Original Bullet</a:t>
-            </a:r>
-          </a:p>
-        </p:txBody>
-      </p:sp>
-      <p:sp>
-        <p:nvSpPr>
-          <p:cNvPr id="6" name="Rounded Rectangle 5"/>
-          <p:cNvSpPr/>
-          <p:nvPr/>
-        </p:nvSpPr>
-        <p:spPr>
-          <a:xfrm>
-            <a:off x="5740399" y="1695449"/>
-            <a:ext cx="4470399" cy="2159000"/>
-          </a:xfrm>
-          <a:prstGeom prst="roundRect">
-            <a:avLst/>
-          </a:prstGeom>
-          <a:solidFill>
-            <a:srgbClr val="1E1E2E"/>
-          </a:solidFill>
-          <a:ln w="12700">
-            <a:solidFill>
-              <a:srgbClr val="1E293B"/>
-            </a:solidFill>
-          </a:ln>
-        </p:spPr>
-        <p:style>
-          <a:lnRef idx="1">
-            <a:schemeClr val="accent1"/>
-          </a:lnRef>
-          <a:fillRef idx="3">
-            <a:schemeClr val="accent1"/>
-          </a:fillRef>
-          <a:effectRef idx="2">
-            <a:schemeClr val="accent1"/>
-          </a:effectRef>
-          <a:fontRef idx="minor">
-            <a:schemeClr val="lt1"/>
-          </a:fontRef>
-        </p:style>
-        <p:txBody>
-          <a:bodyPr rtlCol="0" anchor="t" wrap="square"/>
+          <a:bodyPr rtlCol="0" anchor="t" wrap="none"/>
           <a:lstStyle/>
           <a:p>
             <a:pPr algn="ctr">
               <a:spcAft>
-                <a:spcPts val="800"/>
+                <a:spcPts val="600"/>
               </a:spcAft>
-              <a:defRPr sz="1200">
+              <a:defRPr sz="1400">
                 <a:solidFill>
                   <a:srgbClr val="60A5FA"/>
                 </a:solidFill>
@@ -3998,7 +4017,7 @@
               </a:defRPr>
             </a:pPr>
             <a:r>
-              <a:t>// Language: PYTHON 3.12.8</a:t>
+              <a:t>// PYTHON 3.12.8</a:t>
             </a:r>
           </a:p>
           <a:p>
@@ -4006,12 +4025,12 @@
               <a:spcAft>
                 <a:spcPts val="200"/>
               </a:spcAft>
-              <a:defRPr sz="2000">
+              <a:defRPr sz="1400">
                 <a:latin typeface="Consolas"/>
               </a:defRPr>
             </a:pPr>
             <a:r>
-              <a:rPr sz="2000">
+              <a:rPr sz="1400">
                 <a:solidFill>
                   <a:srgbClr val="788291"/>
                 </a:solidFill>
@@ -4025,12 +4044,12 @@
               <a:spcAft>
                 <a:spcPts val="200"/>
               </a:spcAft>
-              <a:defRPr sz="2000">
+              <a:defRPr sz="1400">
                 <a:latin typeface="Consolas"/>
               </a:defRPr>
             </a:pPr>
             <a:r>
-              <a:rPr sz="2000">
+              <a:rPr sz="1400">
                 <a:solidFill>
                   <a:srgbClr val="F0F4FA"/>
                 </a:solidFill>
@@ -4039,7 +4058,7 @@
               <a:t>message</a:t>
             </a:r>
             <a:r>
-              <a:rPr sz="2000">
+              <a:rPr sz="1400">
                 <a:solidFill>
                   <a:srgbClr val="F0F4FA"/>
                 </a:solidFill>
@@ -4048,7 +4067,7 @@
               <a:t> </a:t>
             </a:r>
             <a:r>
-              <a:rPr sz="2000">
+              <a:rPr sz="1400">
                 <a:solidFill>
                   <a:srgbClr val="56B6C2"/>
                 </a:solidFill>
@@ -4057,7 +4076,7 @@
               <a:t>=</a:t>
             </a:r>
             <a:r>
-              <a:rPr sz="2000">
+              <a:rPr sz="1400">
                 <a:solidFill>
                   <a:srgbClr val="F0F4FA"/>
                 </a:solidFill>
@@ -4066,7 +4085,7 @@
               <a:t> </a:t>
             </a:r>
             <a:r>
-              <a:rPr sz="2000">
+              <a:rPr sz="1400">
                 <a:solidFill>
                   <a:srgbClr val="98C379"/>
                 </a:solidFill>
@@ -4075,7 +4094,7 @@
               <a:t>"</a:t>
             </a:r>
             <a:r>
-              <a:rPr sz="2000">
+              <a:rPr sz="1400">
                 <a:solidFill>
                   <a:srgbClr val="98C379"/>
                 </a:solidFill>
@@ -4084,7 +4103,7 @@
               <a:t>Original Concept Executed in Python 3.12</a:t>
             </a:r>
             <a:r>
-              <a:rPr sz="2000">
+              <a:rPr sz="1400">
                 <a:solidFill>
                   <a:srgbClr val="98C379"/>
                 </a:solidFill>
@@ -4098,12 +4117,12 @@
               <a:spcAft>
                 <a:spcPts val="200"/>
               </a:spcAft>
-              <a:defRPr sz="2000">
+              <a:defRPr sz="1400">
                 <a:latin typeface="Consolas"/>
               </a:defRPr>
             </a:pPr>
             <a:r>
-              <a:rPr sz="2000">
+              <a:rPr sz="1400">
                 <a:solidFill>
                   <a:srgbClr val="E5C07B"/>
                 </a:solidFill>
@@ -4112,7 +4131,7 @@
               <a:t>print</a:t>
             </a:r>
             <a:r>
-              <a:rPr sz="2000">
+              <a:rPr sz="1400">
                 <a:solidFill>
                   <a:srgbClr val="ABB2BF"/>
                 </a:solidFill>
@@ -4121,7 +4140,7 @@
               <a:t>(</a:t>
             </a:r>
             <a:r>
-              <a:rPr sz="2000">
+              <a:rPr sz="1400">
                 <a:solidFill>
                   <a:srgbClr val="F0F4FA"/>
                 </a:solidFill>
@@ -4130,7 +4149,7 @@
               <a:t>message</a:t>
             </a:r>
             <a:r>
-              <a:rPr sz="2000">
+              <a:rPr sz="1400">
                 <a:solidFill>
                   <a:srgbClr val="ABB2BF"/>
                 </a:solidFill>
@@ -4144,12 +4163,12 @@
               <a:spcAft>
                 <a:spcPts val="200"/>
               </a:spcAft>
-              <a:defRPr sz="2000">
+              <a:defRPr sz="1400">
                 <a:latin typeface="Consolas"/>
               </a:defRPr>
             </a:pPr>
             <a:r>
-              <a:rPr sz="2000">
+              <a:rPr sz="1400">
                 <a:solidFill>
                   <a:srgbClr val="C678DD"/>
                 </a:solidFill>
@@ -4158,7 +4177,7 @@
               <a:t>return</a:t>
             </a:r>
             <a:r>
-              <a:rPr sz="2000">
+              <a:rPr sz="1400">
                 <a:solidFill>
                   <a:srgbClr val="F0F4FA"/>
                 </a:solidFill>
@@ -4167,7 +4186,7 @@
               <a:t> </a:t>
             </a:r>
             <a:r>
-              <a:rPr sz="2000">
+              <a:rPr sz="1400">
                 <a:solidFill>
                   <a:srgbClr val="F0F4FA"/>
                 </a:solidFill>
@@ -4181,12 +4200,12 @@
               <a:spcAft>
                 <a:spcPts val="200"/>
               </a:spcAft>
-              <a:defRPr sz="2000">
+              <a:defRPr sz="1400">
                 <a:latin typeface="Consolas"/>
               </a:defRPr>
             </a:pPr>
             <a:r>
-              <a:rPr sz="2000">
+              <a:rPr sz="1400">
                 <a:solidFill>
                   <a:srgbClr val="F0F4FA"/>
                 </a:solidFill>
@@ -4195,7 +4214,7 @@
               <a:t>asyncio</a:t>
             </a:r>
             <a:r>
-              <a:rPr sz="2000">
+              <a:rPr sz="1400">
                 <a:solidFill>
                   <a:srgbClr val="56B6C2"/>
                 </a:solidFill>
@@ -4204,7 +4223,7 @@
               <a:t>.</a:t>
             </a:r>
             <a:r>
-              <a:rPr sz="2000">
+              <a:rPr sz="1400">
                 <a:solidFill>
                   <a:srgbClr val="F0F4FA"/>
                 </a:solidFill>
@@ -4213,7 +4232,7 @@
               <a:t>run</a:t>
             </a:r>
             <a:r>
-              <a:rPr sz="2000">
+              <a:rPr sz="1400">
                 <a:solidFill>
                   <a:srgbClr val="ABB2BF"/>
                 </a:solidFill>
@@ -4222,7 +4241,7 @@
               <a:t>(</a:t>
             </a:r>
             <a:r>
-              <a:rPr sz="2000">
+              <a:rPr sz="1400">
                 <a:solidFill>
                   <a:srgbClr val="F0F4FA"/>
                 </a:solidFill>
@@ -4231,7 +4250,7 @@
               <a:t>demonstrate_concept</a:t>
             </a:r>
             <a:r>
-              <a:rPr sz="2000">
+              <a:rPr sz="1400">
                 <a:solidFill>
                   <a:srgbClr val="ABB2BF"/>
                 </a:solidFill>
@@ -4240,7 +4259,7 @@
               <a:t>(</a:t>
             </a:r>
             <a:r>
-              <a:rPr sz="2000">
+              <a:rPr sz="1400">
                 <a:solidFill>
                   <a:srgbClr val="ABB2BF"/>
                 </a:solidFill>
@@ -4249,7 +4268,7 @@
               <a:t>)</a:t>
             </a:r>
             <a:r>
-              <a:rPr sz="2000">
+              <a:rPr sz="1400">
                 <a:solidFill>
                   <a:srgbClr val="ABB2BF"/>
                 </a:solidFill>
@@ -4258,29 +4277,40 @@
               <a:t>)</a:t>
             </a:r>
           </a:p>
-          <a:p>
-            <a:pPr>
-              <a:spcBef>
-                <a:spcPts val="1200"/>
-              </a:spcBef>
+        </p:txBody>
+      </p:sp>
+      <p:sp>
+        <p:nvSpPr>
+          <p:cNvPr id="8" name="Footer Placeholder"/>
+          <p:cNvSpPr txBox="1"/>
+          <p:nvPr/>
+        </p:nvSpPr>
+        <p:spPr>
+          <a:xfrm>
+            <a:off x="1371599" y="6223000"/>
+            <a:ext cx="8889999" cy="152400"/>
+          </a:xfrm>
+          <a:prstGeom prst="rect">
+            <a:avLst/>
+          </a:prstGeom>
+          <a:noFill/>
+        </p:spPr>
+        <p:txBody>
+          <a:bodyPr wrap="square">
+            <a:spAutoFit/>
+          </a:bodyPr>
+          <a:lstStyle/>
+          <a:p>
+            <a:pPr algn="l">
+              <a:defRPr sz="1100">
+                <a:solidFill>
+                  <a:srgbClr val="64748B"/>
+                </a:solidFill>
+                <a:latin typeface="Segoe UI"/>
+              </a:defRPr>
             </a:pPr>
             <a:r>
-              <a:rPr sz="1800" b="1">
-                <a:solidFill>
-                  <a:srgbClr val="4ADE80"/>
-                </a:solidFill>
-                <a:latin typeface="Consolas"/>
-              </a:rPr>
-              <a:t>Expected Output: </a:t>
-            </a:r>
-            <a:r>
-              <a:rPr sz="1800">
-                <a:solidFill>
-                  <a:srgbClr val="E2E8F0"/>
-                </a:solidFill>
-                <a:latin typeface="Consolas"/>
-              </a:rPr>
-              <a:t>Original Concept Executed in Python 3.12</a:t>
+              <a:t>Dr. D. Y. Patil Vidyapeeth, Pune (Deemed to be University)</a:t>
             </a:r>
           </a:p>
         </p:txBody>
@@ -4305,7 +4335,7 @@
       <p:grpSpPr/>
       <p:pic>
         <p:nvPicPr>
-          <p:cNvPr id="2" name="Picture 1" descr="DPU_background.png"/>
+          <p:cNvPr id="4" name="Picture 3" descr="DPU_Brand_template.png"/>
           <p:cNvPicPr>
             <a:picLocks noChangeAspect="1"/>
           </p:cNvPicPr>
@@ -4329,14 +4359,109 @@
       </p:pic>
       <p:sp>
         <p:nvSpPr>
-          <p:cNvPr id="3" name="TextBox 2"/>
+          <p:cNvPr id="2" name="Title 1"/>
+          <p:cNvSpPr>
+            <a:spLocks noGrp="1"/>
+          </p:cNvSpPr>
+          <p:nvPr>
+            <p:ph type="title"/>
+          </p:nvPr>
+        </p:nvSpPr>
+        <p:spPr>
+          <a:xfrm>
+            <a:off x="1371599" y="1079500"/>
+            <a:ext cx="9448799" cy="438149"/>
+          </a:xfrm>
+        </p:spPr>
+        <p:txBody>
+          <a:bodyPr wrap="square"/>
+          <a:lstStyle/>
+          <a:p>
+            <a:pPr algn="l">
+              <a:defRPr sz="4400" b="1">
+                <a:solidFill>
+                  <a:srgbClr val="C0392B"/>
+                </a:solidFill>
+                <a:latin typeface="Arial"/>
+              </a:defRPr>
+            </a:pPr>
+            <a:r>
+              <a:t>Closing Slide</a:t>
+            </a:r>
+          </a:p>
+        </p:txBody>
+      </p:sp>
+      <p:sp>
+        <p:nvSpPr>
+          <p:cNvPr id="3" name="Content Placeholder 2"/>
+          <p:cNvSpPr>
+            <a:spLocks noGrp="1"/>
+          </p:cNvSpPr>
+          <p:nvPr>
+            <p:ph idx="1"/>
+          </p:nvPr>
+        </p:nvSpPr>
+        <p:spPr>
+          <a:xfrm>
+            <a:off x="1562099" y="1758949"/>
+            <a:ext cx="9067799" cy="380999"/>
+          </a:xfrm>
+        </p:spPr>
+        <p:txBody>
+          <a:bodyPr wrap="square" anchor="t"/>
+          <a:lstStyle/>
+          <a:p>
+            <a:pPr algn="l">
+              <a:spcAft>
+                <a:spcPts val="1000"/>
+              </a:spcAft>
+              <a:defRPr sz="3000">
+                <a:solidFill>
+                  <a:srgbClr val="0F172A"/>
+                </a:solidFill>
+                <a:latin typeface="Segoe UI"/>
+              </a:defRPr>
+            </a:pPr>
+            <a:r>
+              <a:t>•  Summary</a:t>
+            </a:r>
+          </a:p>
+        </p:txBody>
+      </p:sp>
+      <p:pic>
+        <p:nvPicPr>
+          <p:cNvPr id="5" name="Picture 4" descr="dpu_logo.png"/>
+          <p:cNvPicPr>
+            <a:picLocks noChangeAspect="1"/>
+          </p:cNvPicPr>
+          <p:nvPr/>
+        </p:nvPicPr>
+        <p:blipFill>
+          <a:blip r:embed="rId3"/>
+          <a:stretch>
+            <a:fillRect/>
+          </a:stretch>
+        </p:blipFill>
+        <p:spPr>
+          <a:xfrm>
+            <a:off x="365760" y="182880"/>
+            <a:ext cx="2926080" cy="731520"/>
+          </a:xfrm>
+          <a:prstGeom prst="rect">
+            <a:avLst/>
+          </a:prstGeom>
+        </p:spPr>
+      </p:pic>
+      <p:sp>
+        <p:nvSpPr>
+          <p:cNvPr id="6" name="Footer Placeholder"/>
           <p:cNvSpPr txBox="1"/>
           <p:nvPr/>
         </p:nvSpPr>
         <p:spPr>
           <a:xfrm>
-            <a:off x="1981199" y="1079500"/>
-            <a:ext cx="8229599" cy="438149"/>
+            <a:off x="1371599" y="6223000"/>
+            <a:ext cx="8889999" cy="152400"/>
           </a:xfrm>
           <a:prstGeom prst="rect">
             <a:avLst/>
@@ -4344,49 +4469,13 @@
           <a:noFill/>
         </p:spPr>
         <p:txBody>
-          <a:bodyPr wrap="square" anchor="ctr">
-            <a:spAutoFit/>
-          </a:bodyPr>
-          <a:lstStyle/>
-          <a:p>
-            <a:pPr algn="l">
-              <a:defRPr sz="4400" b="1">
-                <a:solidFill>
-                  <a:srgbClr val="00132A"/>
-                </a:solidFill>
-                <a:latin typeface="Arial"/>
-              </a:defRPr>
-            </a:pPr>
-            <a:r>
-              <a:t>Closing Slide</a:t>
-            </a:r>
-          </a:p>
-        </p:txBody>
-      </p:sp>
-      <p:sp>
-        <p:nvSpPr>
-          <p:cNvPr id="4" name="TextBox 3"/>
-          <p:cNvSpPr txBox="1"/>
-          <p:nvPr/>
-        </p:nvSpPr>
-        <p:spPr>
-          <a:xfrm>
-            <a:off x="1981199" y="6095999"/>
-            <a:ext cx="8229599" cy="152400"/>
-          </a:xfrm>
-          <a:prstGeom prst="rect">
-            <a:avLst/>
-          </a:prstGeom>
-          <a:noFill/>
-        </p:spPr>
-        <p:txBody>
           <a:bodyPr wrap="square">
             <a:spAutoFit/>
           </a:bodyPr>
           <a:lstStyle/>
           <a:p>
             <a:pPr algn="l">
-              <a:defRPr sz="1200">
+              <a:defRPr sz="1100">
                 <a:solidFill>
                   <a:srgbClr val="64748B"/>
                 </a:solidFill>
@@ -4394,65 +4483,7 @@
               </a:defRPr>
             </a:pPr>
             <a:r>
-              <a:t>DPU   •   Closing Slide   •   Slide 3</a:t>
-            </a:r>
-          </a:p>
-        </p:txBody>
-      </p:sp>
-      <p:sp>
-        <p:nvSpPr>
-          <p:cNvPr id="5" name="Rounded Rectangle 4"/>
-          <p:cNvSpPr/>
-          <p:nvPr/>
-        </p:nvSpPr>
-        <p:spPr>
-          <a:xfrm>
-            <a:off x="2171699" y="1758949"/>
-            <a:ext cx="7848599" cy="380999"/>
-          </a:xfrm>
-          <a:prstGeom prst="roundRect">
-            <a:avLst/>
-          </a:prstGeom>
-          <a:solidFill>
-            <a:srgbClr val="F8FAFC"/>
-          </a:solidFill>
-          <a:ln w="12700">
-            <a:solidFill>
-              <a:srgbClr val="E2E8F0"/>
-            </a:solidFill>
-          </a:ln>
-        </p:spPr>
-        <p:style>
-          <a:lnRef idx="1">
-            <a:schemeClr val="accent1"/>
-          </a:lnRef>
-          <a:fillRef idx="3">
-            <a:schemeClr val="accent1"/>
-          </a:fillRef>
-          <a:effectRef idx="2">
-            <a:schemeClr val="accent1"/>
-          </a:effectRef>
-          <a:fontRef idx="minor">
-            <a:schemeClr val="lt1"/>
-          </a:fontRef>
-        </p:style>
-        <p:txBody>
-          <a:bodyPr rtlCol="0" anchor="t" wrap="square"/>
-          <a:lstStyle/>
-          <a:p>
-            <a:pPr algn="l">
-              <a:spcAft>
-                <a:spcPts val="1200"/>
-              </a:spcAft>
-              <a:defRPr sz="3000">
-                <a:solidFill>
-                  <a:srgbClr val="0F172A"/>
-                </a:solidFill>
-                <a:latin typeface="Segoe UI"/>
-              </a:defRPr>
-            </a:pPr>
-            <a:r>
-              <a:t>•  Summary</a:t>
+              <a:t>Dr. D. Y. Patil Vidyapeeth, Pune (Deemed to be University)</a:t>
             </a:r>
           </a:p>
         </p:txBody>
